--- a/docs/tema1/diapositivas/consultas-jpql-transacciones.pptx
+++ b/docs/tema1/diapositivas/consultas-jpql-transacciones.pptx
@@ -4055,620 +4055,37 @@
           </a:p>
         </p:txBody>
       </p:sp>
-      <p:graphicFrame>
-        <p:nvGraphicFramePr>
-          <p:cNvPr id="12" name="Table 0"/>
-          <p:cNvGraphicFramePr>
-            <a:graphicFrameLocks noGrp="1"/>
-          </p:cNvGraphicFramePr>
-          <p:nvPr>
-            <p:extLst>
-              <p:ext uri="{D42A27DB-BD31-4B8C-83A1-F6EECF244321}">
-                <p14:modId xmlns:p14="http://schemas.microsoft.com/office/powerpoint/2010/main" val="1579011935"/>
-              </p:ext>
-            </p:extLst>
-          </p:nvPr>
-        </p:nvGraphicFramePr>
-        <p:xfrm>
-          <a:off x="548640" y="2286000"/>
-          <a:ext cx="11091672" cy="3108960"/>
-        </p:xfrm>
-        <a:graphic>
-          <a:graphicData uri="http://schemas.openxmlformats.org/drawingml/2006/table">
-            <a:tbl>
-              <a:tblPr/>
-              <a:tblGrid>
-                <a:gridCol w="4658502">
-                  <a:extLst>
-                    <a:ext uri="{9D8B030D-6E8A-4147-A177-3AD203B41FA5}">
-                      <a16:colId xmlns:a16="http://schemas.microsoft.com/office/drawing/2014/main" val="20000"/>
-                    </a:ext>
-                  </a:extLst>
-                </a:gridCol>
-                <a:gridCol w="6433170">
-                  <a:extLst>
-                    <a:ext uri="{9D8B030D-6E8A-4147-A177-3AD203B41FA5}">
-                      <a16:colId xmlns:a16="http://schemas.microsoft.com/office/drawing/2014/main" val="20001"/>
-                    </a:ext>
-                  </a:extLst>
-                </a:gridCol>
-              </a:tblGrid>
-              <a:tr h="777240">
-                <a:tc>
-                  <a:txBody>
-                    <a:bodyPr/>
-                    <a:lstStyle/>
-                    <a:p>
-                      <a:pPr marL="0" indent="0" algn="ctr">
-                        <a:buNone/>
-                      </a:pPr>
-                      <a:r>
-                        <a:rPr lang="en-US" sz="1700" b="1" dirty="0">
-                          <a:solidFill>
-                            <a:srgbClr val="FFFFFF"/>
-                          </a:solidFill>
-                          <a:latin typeface="Arial" pitchFamily="34" charset="0"/>
-                          <a:ea typeface="Arial" pitchFamily="34" charset="-122"/>
-                          <a:cs typeface="Arial" pitchFamily="34" charset="-120"/>
-                        </a:rPr>
-                        <a:t>Vía</a:t>
-                      </a:r>
-                      <a:endParaRPr lang="en-US" sz="1700" dirty="0">
-                        <a:latin typeface="Arial" charset="0"/>
-                        <a:ea typeface="Arial" charset="0"/>
-                        <a:cs typeface="Arial" charset="0"/>
-                      </a:endParaRPr>
-                    </a:p>
-                  </a:txBody>
-                  <a:tcPr anchor="ctr">
-                    <a:lnL w="12700" cap="flat" cmpd="sng" algn="ctr">
-                      <a:solidFill>
-                        <a:srgbClr val="EEEEEE"/>
-                      </a:solidFill>
-                      <a:prstDash val="solid"/>
-                      <a:round/>
-                      <a:headEnd type="none" w="med" len="med"/>
-                      <a:tailEnd type="none" w="med" len="med"/>
-                    </a:lnL>
-                    <a:lnR w="12700" cap="flat" cmpd="sng" algn="ctr">
-                      <a:solidFill>
-                        <a:srgbClr val="EEEEEE"/>
-                      </a:solidFill>
-                      <a:prstDash val="solid"/>
-                      <a:round/>
-                      <a:headEnd type="none" w="med" len="med"/>
-                      <a:tailEnd type="none" w="med" len="med"/>
-                    </a:lnR>
-                    <a:lnT w="12700" cap="flat" cmpd="sng" algn="ctr">
-                      <a:solidFill>
-                        <a:srgbClr val="EEEEEE"/>
-                      </a:solidFill>
-                      <a:prstDash val="solid"/>
-                      <a:round/>
-                      <a:headEnd type="none" w="med" len="med"/>
-                      <a:tailEnd type="none" w="med" len="med"/>
-                    </a:lnT>
-                    <a:lnB w="12700" cap="flat" cmpd="sng" algn="ctr">
-                      <a:solidFill>
-                        <a:srgbClr val="EEEEEE"/>
-                      </a:solidFill>
-                      <a:prstDash val="solid"/>
-                      <a:round/>
-                      <a:headEnd type="none" w="med" len="med"/>
-                      <a:tailEnd type="none" w="med" len="med"/>
-                    </a:lnB>
-                    <a:solidFill>
-                      <a:srgbClr val="C62828"/>
-                    </a:solidFill>
-                  </a:tcPr>
-                </a:tc>
-                <a:tc>
-                  <a:txBody>
-                    <a:bodyPr/>
-                    <a:lstStyle/>
-                    <a:p>
-                      <a:pPr marL="0" indent="0" algn="ctr">
-                        <a:buNone/>
-                      </a:pPr>
-                      <a:r>
-                        <a:rPr lang="en-US" sz="1700" b="1" dirty="0">
-                          <a:solidFill>
-                            <a:srgbClr val="FFFFFF"/>
-                          </a:solidFill>
-                          <a:latin typeface="Arial" pitchFamily="34" charset="0"/>
-                          <a:ea typeface="Arial" pitchFamily="34" charset="-122"/>
-                          <a:cs typeface="Arial" pitchFamily="34" charset="-120"/>
-                        </a:rPr>
-                        <a:t>Cuándo usarla</a:t>
-                      </a:r>
-                      <a:endParaRPr lang="en-US" sz="1700" dirty="0">
-                        <a:latin typeface="Arial" charset="0"/>
-                        <a:ea typeface="Arial" charset="0"/>
-                        <a:cs typeface="Arial" charset="0"/>
-                      </a:endParaRPr>
-                    </a:p>
-                  </a:txBody>
-                  <a:tcPr anchor="ctr">
-                    <a:lnL w="12700" cap="flat" cmpd="sng" algn="ctr">
-                      <a:solidFill>
-                        <a:srgbClr val="EEEEEE"/>
-                      </a:solidFill>
-                      <a:prstDash val="solid"/>
-                      <a:round/>
-                      <a:headEnd type="none" w="med" len="med"/>
-                      <a:tailEnd type="none" w="med" len="med"/>
-                    </a:lnL>
-                    <a:lnR w="12700" cap="flat" cmpd="sng" algn="ctr">
-                      <a:solidFill>
-                        <a:srgbClr val="EEEEEE"/>
-                      </a:solidFill>
-                      <a:prstDash val="solid"/>
-                      <a:round/>
-                      <a:headEnd type="none" w="med" len="med"/>
-                      <a:tailEnd type="none" w="med" len="med"/>
-                    </a:lnR>
-                    <a:lnT w="12700" cap="flat" cmpd="sng" algn="ctr">
-                      <a:solidFill>
-                        <a:srgbClr val="EEEEEE"/>
-                      </a:solidFill>
-                      <a:prstDash val="solid"/>
-                      <a:round/>
-                      <a:headEnd type="none" w="med" len="med"/>
-                      <a:tailEnd type="none" w="med" len="med"/>
-                    </a:lnT>
-                    <a:lnB w="12700" cap="flat" cmpd="sng" algn="ctr">
-                      <a:solidFill>
-                        <a:srgbClr val="EEEEEE"/>
-                      </a:solidFill>
-                      <a:prstDash val="solid"/>
-                      <a:round/>
-                      <a:headEnd type="none" w="med" len="med"/>
-                      <a:tailEnd type="none" w="med" len="med"/>
-                    </a:lnB>
-                    <a:solidFill>
-                      <a:srgbClr val="C62828"/>
-                    </a:solidFill>
-                  </a:tcPr>
-                </a:tc>
-                <a:extLst>
-                  <a:ext uri="{0D108BD9-81ED-4DB2-BD59-A6C34878D82A}">
-                    <a16:rowId xmlns:a16="http://schemas.microsoft.com/office/drawing/2014/main" val="10000"/>
-                  </a:ext>
-                </a:extLst>
-              </a:tr>
-              <a:tr h="777240">
-                <a:tc>
-                  <a:txBody>
-                    <a:bodyPr/>
-                    <a:lstStyle/>
-                    <a:p>
-                      <a:pPr marL="0" indent="0">
-                        <a:buNone/>
-                      </a:pPr>
-                      <a:r>
-                        <a:rPr lang="en-US" sz="1500" b="1" dirty="0">
-                          <a:solidFill>
-                            <a:srgbClr val="212121"/>
-                          </a:solidFill>
-                          <a:latin typeface="Arial" pitchFamily="34" charset="0"/>
-                          <a:ea typeface="Arial" pitchFamily="34" charset="-122"/>
-                          <a:cs typeface="Arial" pitchFamily="34" charset="-120"/>
-                        </a:rPr>
-                        <a:t>Naming de método (findByTitulo, findByEditorialId)</a:t>
-                      </a:r>
-                      <a:endParaRPr lang="en-US" sz="1500" dirty="0">
-                        <a:latin typeface="Arial" charset="0"/>
-                        <a:ea typeface="Arial" charset="0"/>
-                        <a:cs typeface="Arial" charset="0"/>
-                      </a:endParaRPr>
-                    </a:p>
-                  </a:txBody>
-                  <a:tcPr anchor="ctr">
-                    <a:lnL w="12700" cap="flat" cmpd="sng" algn="ctr">
-                      <a:solidFill>
-                        <a:srgbClr val="EEEEEE"/>
-                      </a:solidFill>
-                      <a:prstDash val="solid"/>
-                      <a:round/>
-                      <a:headEnd type="none" w="med" len="med"/>
-                      <a:tailEnd type="none" w="med" len="med"/>
-                    </a:lnL>
-                    <a:lnR w="12700" cap="flat" cmpd="sng" algn="ctr">
-                      <a:solidFill>
-                        <a:srgbClr val="EEEEEE"/>
-                      </a:solidFill>
-                      <a:prstDash val="solid"/>
-                      <a:round/>
-                      <a:headEnd type="none" w="med" len="med"/>
-                      <a:tailEnd type="none" w="med" len="med"/>
-                    </a:lnR>
-                    <a:lnT w="12700" cap="flat" cmpd="sng" algn="ctr">
-                      <a:solidFill>
-                        <a:srgbClr val="EEEEEE"/>
-                      </a:solidFill>
-                      <a:prstDash val="solid"/>
-                      <a:round/>
-                      <a:headEnd type="none" w="med" len="med"/>
-                      <a:tailEnd type="none" w="med" len="med"/>
-                    </a:lnT>
-                    <a:lnB w="12700" cap="flat" cmpd="sng" algn="ctr">
-                      <a:solidFill>
-                        <a:srgbClr val="EEEEEE"/>
-                      </a:solidFill>
-                      <a:prstDash val="solid"/>
-                      <a:round/>
-                      <a:headEnd type="none" w="med" len="med"/>
-                      <a:tailEnd type="none" w="med" len="med"/>
-                    </a:lnB>
-                    <a:solidFill>
-                      <a:srgbClr val="FFFFFF"/>
-                    </a:solidFill>
-                  </a:tcPr>
-                </a:tc>
-                <a:tc>
-                  <a:txBody>
-                    <a:bodyPr/>
-                    <a:lstStyle/>
-                    <a:p>
-                      <a:pPr marL="0" indent="0">
-                        <a:buNone/>
-                      </a:pPr>
-                      <a:r>
-                        <a:rPr lang="en-US" sz="1500" dirty="0">
-                          <a:solidFill>
-                            <a:srgbClr val="212121"/>
-                          </a:solidFill>
-                          <a:latin typeface="Arial" pitchFamily="34" charset="0"/>
-                          <a:ea typeface="Arial" pitchFamily="34" charset="-122"/>
-                          <a:cs typeface="Arial" pitchFamily="34" charset="-120"/>
-                        </a:rPr>
-                        <a:t>Consultas simples, fijas, sin lógica adicional.</a:t>
-                      </a:r>
-                      <a:endParaRPr lang="en-US" sz="1500" dirty="0">
-                        <a:latin typeface="Arial" charset="0"/>
-                        <a:ea typeface="Arial" charset="0"/>
-                        <a:cs typeface="Arial" charset="0"/>
-                      </a:endParaRPr>
-                    </a:p>
-                  </a:txBody>
-                  <a:tcPr anchor="ctr">
-                    <a:lnL w="12700" cap="flat" cmpd="sng" algn="ctr">
-                      <a:solidFill>
-                        <a:srgbClr val="EEEEEE"/>
-                      </a:solidFill>
-                      <a:prstDash val="solid"/>
-                      <a:round/>
-                      <a:headEnd type="none" w="med" len="med"/>
-                      <a:tailEnd type="none" w="med" len="med"/>
-                    </a:lnL>
-                    <a:lnR w="12700" cap="flat" cmpd="sng" algn="ctr">
-                      <a:solidFill>
-                        <a:srgbClr val="EEEEEE"/>
-                      </a:solidFill>
-                      <a:prstDash val="solid"/>
-                      <a:round/>
-                      <a:headEnd type="none" w="med" len="med"/>
-                      <a:tailEnd type="none" w="med" len="med"/>
-                    </a:lnR>
-                    <a:lnT w="12700" cap="flat" cmpd="sng" algn="ctr">
-                      <a:solidFill>
-                        <a:srgbClr val="EEEEEE"/>
-                      </a:solidFill>
-                      <a:prstDash val="solid"/>
-                      <a:round/>
-                      <a:headEnd type="none" w="med" len="med"/>
-                      <a:tailEnd type="none" w="med" len="med"/>
-                    </a:lnT>
-                    <a:lnB w="12700" cap="flat" cmpd="sng" algn="ctr">
-                      <a:solidFill>
-                        <a:srgbClr val="EEEEEE"/>
-                      </a:solidFill>
-                      <a:prstDash val="solid"/>
-                      <a:round/>
-                      <a:headEnd type="none" w="med" len="med"/>
-                      <a:tailEnd type="none" w="med" len="med"/>
-                    </a:lnB>
-                    <a:solidFill>
-                      <a:srgbClr val="FFFFFF"/>
-                    </a:solidFill>
-                  </a:tcPr>
-                </a:tc>
-                <a:extLst>
-                  <a:ext uri="{0D108BD9-81ED-4DB2-BD59-A6C34878D82A}">
-                    <a16:rowId xmlns:a16="http://schemas.microsoft.com/office/drawing/2014/main" val="10001"/>
-                  </a:ext>
-                </a:extLst>
-              </a:tr>
-              <a:tr h="777240">
-                <a:tc>
-                  <a:txBody>
-                    <a:bodyPr/>
-                    <a:lstStyle/>
-                    <a:p>
-                      <a:pPr marL="0" indent="0">
-                        <a:buNone/>
-                      </a:pPr>
-                      <a:r>
-                        <a:rPr lang="en-US" sz="1500" b="1" dirty="0">
-                          <a:solidFill>
-                            <a:srgbClr val="212121"/>
-                          </a:solidFill>
-                          <a:latin typeface="Arial" pitchFamily="34" charset="0"/>
-                          <a:ea typeface="Arial" pitchFamily="34" charset="-122"/>
-                          <a:cs typeface="Arial" pitchFamily="34" charset="-120"/>
-                        </a:rPr>
-                        <a:t>Specifications</a:t>
-                      </a:r>
-                      <a:endParaRPr lang="en-US" sz="1500" dirty="0">
-                        <a:latin typeface="Arial" charset="0"/>
-                        <a:ea typeface="Arial" charset="0"/>
-                        <a:cs typeface="Arial" charset="0"/>
-                      </a:endParaRPr>
-                    </a:p>
-                  </a:txBody>
-                  <a:tcPr anchor="ctr">
-                    <a:lnL w="12700" cap="flat" cmpd="sng" algn="ctr">
-                      <a:solidFill>
-                        <a:srgbClr val="EEEEEE"/>
-                      </a:solidFill>
-                      <a:prstDash val="solid"/>
-                      <a:round/>
-                      <a:headEnd type="none" w="med" len="med"/>
-                      <a:tailEnd type="none" w="med" len="med"/>
-                    </a:lnL>
-                    <a:lnR w="12700" cap="flat" cmpd="sng" algn="ctr">
-                      <a:solidFill>
-                        <a:srgbClr val="EEEEEE"/>
-                      </a:solidFill>
-                      <a:prstDash val="solid"/>
-                      <a:round/>
-                      <a:headEnd type="none" w="med" len="med"/>
-                      <a:tailEnd type="none" w="med" len="med"/>
-                    </a:lnR>
-                    <a:lnT w="12700" cap="flat" cmpd="sng" algn="ctr">
-                      <a:solidFill>
-                        <a:srgbClr val="EEEEEE"/>
-                      </a:solidFill>
-                      <a:prstDash val="solid"/>
-                      <a:round/>
-                      <a:headEnd type="none" w="med" len="med"/>
-                      <a:tailEnd type="none" w="med" len="med"/>
-                    </a:lnT>
-                    <a:lnB w="12700" cap="flat" cmpd="sng" algn="ctr">
-                      <a:solidFill>
-                        <a:srgbClr val="EEEEEE"/>
-                      </a:solidFill>
-                      <a:prstDash val="solid"/>
-                      <a:round/>
-                      <a:headEnd type="none" w="med" len="med"/>
-                      <a:tailEnd type="none" w="med" len="med"/>
-                    </a:lnB>
-                    <a:solidFill>
-                      <a:srgbClr val="F5F5F5"/>
-                    </a:solidFill>
-                  </a:tcPr>
-                </a:tc>
-                <a:tc>
-                  <a:txBody>
-                    <a:bodyPr/>
-                    <a:lstStyle/>
-                    <a:p>
-                      <a:pPr marL="0" indent="0">
-                        <a:buNone/>
-                      </a:pPr>
-                      <a:r>
-                        <a:rPr lang="en-US" sz="1500" dirty="0">
-                          <a:solidFill>
-                            <a:srgbClr val="212121"/>
-                          </a:solidFill>
-                          <a:latin typeface="Arial" pitchFamily="34" charset="0"/>
-                          <a:ea typeface="Arial" pitchFamily="34" charset="-122"/>
-                          <a:cs typeface="Arial" pitchFamily="34" charset="-120"/>
-                        </a:rPr>
-                        <a:t>Filtros dinámicos, combinables en tiempo de ejecución.</a:t>
-                      </a:r>
-                      <a:endParaRPr lang="en-US" sz="1500" dirty="0">
-                        <a:latin typeface="Arial" charset="0"/>
-                        <a:ea typeface="Arial" charset="0"/>
-                        <a:cs typeface="Arial" charset="0"/>
-                      </a:endParaRPr>
-                    </a:p>
-                  </a:txBody>
-                  <a:tcPr anchor="ctr">
-                    <a:lnL w="12700" cap="flat" cmpd="sng" algn="ctr">
-                      <a:solidFill>
-                        <a:srgbClr val="EEEEEE"/>
-                      </a:solidFill>
-                      <a:prstDash val="solid"/>
-                      <a:round/>
-                      <a:headEnd type="none" w="med" len="med"/>
-                      <a:tailEnd type="none" w="med" len="med"/>
-                    </a:lnL>
-                    <a:lnR w="12700" cap="flat" cmpd="sng" algn="ctr">
-                      <a:solidFill>
-                        <a:srgbClr val="EEEEEE"/>
-                      </a:solidFill>
-                      <a:prstDash val="solid"/>
-                      <a:round/>
-                      <a:headEnd type="none" w="med" len="med"/>
-                      <a:tailEnd type="none" w="med" len="med"/>
-                    </a:lnR>
-                    <a:lnT w="12700" cap="flat" cmpd="sng" algn="ctr">
-                      <a:solidFill>
-                        <a:srgbClr val="EEEEEE"/>
-                      </a:solidFill>
-                      <a:prstDash val="solid"/>
-                      <a:round/>
-                      <a:headEnd type="none" w="med" len="med"/>
-                      <a:tailEnd type="none" w="med" len="med"/>
-                    </a:lnT>
-                    <a:lnB w="12700" cap="flat" cmpd="sng" algn="ctr">
-                      <a:solidFill>
-                        <a:srgbClr val="EEEEEE"/>
-                      </a:solidFill>
-                      <a:prstDash val="solid"/>
-                      <a:round/>
-                      <a:headEnd type="none" w="med" len="med"/>
-                      <a:tailEnd type="none" w="med" len="med"/>
-                    </a:lnB>
-                    <a:solidFill>
-                      <a:srgbClr val="F5F5F5"/>
-                    </a:solidFill>
-                  </a:tcPr>
-                </a:tc>
-                <a:extLst>
-                  <a:ext uri="{0D108BD9-81ED-4DB2-BD59-A6C34878D82A}">
-                    <a16:rowId xmlns:a16="http://schemas.microsoft.com/office/drawing/2014/main" val="10002"/>
-                  </a:ext>
-                </a:extLst>
-              </a:tr>
-              <a:tr h="777240">
-                <a:tc>
-                  <a:txBody>
-                    <a:bodyPr/>
-                    <a:lstStyle/>
-                    <a:p>
-                      <a:pPr marL="0" indent="0">
-                        <a:buNone/>
-                      </a:pPr>
-                      <a:r>
-                        <a:rPr lang="en-US" sz="1500" b="1" dirty="0">
-                          <a:solidFill>
-                            <a:srgbClr val="212121"/>
-                          </a:solidFill>
-                          <a:latin typeface="Arial" pitchFamily="34" charset="0"/>
-                          <a:ea typeface="Arial" pitchFamily="34" charset="-122"/>
-                          <a:cs typeface="Arial" pitchFamily="34" charset="-120"/>
-                        </a:rPr>
-                        <a:t>@Query con JPQL</a:t>
-                      </a:r>
-                      <a:endParaRPr lang="en-US" sz="1500" dirty="0">
-                        <a:latin typeface="Arial" charset="0"/>
-                        <a:ea typeface="Arial" charset="0"/>
-                        <a:cs typeface="Arial" charset="0"/>
-                      </a:endParaRPr>
-                    </a:p>
-                  </a:txBody>
-                  <a:tcPr anchor="ctr">
-                    <a:lnL w="12700" cap="flat" cmpd="sng" algn="ctr">
-                      <a:solidFill>
-                        <a:srgbClr val="EEEEEE"/>
-                      </a:solidFill>
-                      <a:prstDash val="solid"/>
-                      <a:round/>
-                      <a:headEnd type="none" w="med" len="med"/>
-                      <a:tailEnd type="none" w="med" len="med"/>
-                    </a:lnL>
-                    <a:lnR w="12700" cap="flat" cmpd="sng" algn="ctr">
-                      <a:solidFill>
-                        <a:srgbClr val="EEEEEE"/>
-                      </a:solidFill>
-                      <a:prstDash val="solid"/>
-                      <a:round/>
-                      <a:headEnd type="none" w="med" len="med"/>
-                      <a:tailEnd type="none" w="med" len="med"/>
-                    </a:lnR>
-                    <a:lnT w="12700" cap="flat" cmpd="sng" algn="ctr">
-                      <a:solidFill>
-                        <a:srgbClr val="EEEEEE"/>
-                      </a:solidFill>
-                      <a:prstDash val="solid"/>
-                      <a:round/>
-                      <a:headEnd type="none" w="med" len="med"/>
-                      <a:tailEnd type="none" w="med" len="med"/>
-                    </a:lnT>
-                    <a:lnB w="12700" cap="flat" cmpd="sng" algn="ctr">
-                      <a:solidFill>
-                        <a:srgbClr val="EEEEEE"/>
-                      </a:solidFill>
-                      <a:prstDash val="solid"/>
-                      <a:round/>
-                      <a:headEnd type="none" w="med" len="med"/>
-                      <a:tailEnd type="none" w="med" len="med"/>
-                    </a:lnB>
-                    <a:solidFill>
-                      <a:srgbClr val="FFFFFF"/>
-                    </a:solidFill>
-                  </a:tcPr>
-                </a:tc>
-                <a:tc>
-                  <a:txBody>
-                    <a:bodyPr/>
-                    <a:lstStyle/>
-                    <a:p>
-                      <a:pPr marL="0" indent="0">
-                        <a:buNone/>
-                      </a:pPr>
-                      <a:r>
-                        <a:rPr lang="en-US" sz="1500" dirty="0">
-                          <a:solidFill>
-                            <a:srgbClr val="212121"/>
-                          </a:solidFill>
-                          <a:latin typeface="Arial" pitchFamily="34" charset="0"/>
-                          <a:ea typeface="Arial" pitchFamily="34" charset="-122"/>
-                          <a:cs typeface="Arial" pitchFamily="34" charset="-120"/>
-                        </a:rPr>
-                        <a:t>Consultas complejas y fijas — típicamente, agregaciones.</a:t>
-                      </a:r>
-                      <a:endParaRPr lang="en-US" sz="1500" dirty="0">
-                        <a:latin typeface="Arial" charset="0"/>
-                        <a:ea typeface="Arial" charset="0"/>
-                        <a:cs typeface="Arial" charset="0"/>
-                      </a:endParaRPr>
-                    </a:p>
-                  </a:txBody>
-                  <a:tcPr anchor="ctr">
-                    <a:lnL w="12700" cap="flat" cmpd="sng" algn="ctr">
-                      <a:solidFill>
-                        <a:srgbClr val="EEEEEE"/>
-                      </a:solidFill>
-                      <a:prstDash val="solid"/>
-                      <a:round/>
-                      <a:headEnd type="none" w="med" len="med"/>
-                      <a:tailEnd type="none" w="med" len="med"/>
-                    </a:lnL>
-                    <a:lnR w="12700" cap="flat" cmpd="sng" algn="ctr">
-                      <a:solidFill>
-                        <a:srgbClr val="EEEEEE"/>
-                      </a:solidFill>
-                      <a:prstDash val="solid"/>
-                      <a:round/>
-                      <a:headEnd type="none" w="med" len="med"/>
-                      <a:tailEnd type="none" w="med" len="med"/>
-                    </a:lnR>
-                    <a:lnT w="12700" cap="flat" cmpd="sng" algn="ctr">
-                      <a:solidFill>
-                        <a:srgbClr val="EEEEEE"/>
-                      </a:solidFill>
-                      <a:prstDash val="solid"/>
-                      <a:round/>
-                      <a:headEnd type="none" w="med" len="med"/>
-                      <a:tailEnd type="none" w="med" len="med"/>
-                    </a:lnT>
-                    <a:lnB w="12700" cap="flat" cmpd="sng" algn="ctr">
-                      <a:solidFill>
-                        <a:srgbClr val="EEEEEE"/>
-                      </a:solidFill>
-                      <a:prstDash val="solid"/>
-                      <a:round/>
-                      <a:headEnd type="none" w="med" len="med"/>
-                      <a:tailEnd type="none" w="med" len="med"/>
-                    </a:lnB>
-                    <a:solidFill>
-                      <a:srgbClr val="FFFFFF"/>
-                    </a:solidFill>
-                  </a:tcPr>
-                </a:tc>
-                <a:extLst>
-                  <a:ext uri="{0D108BD9-81ED-4DB2-BD59-A6C34878D82A}">
-                    <a16:rowId xmlns:a16="http://schemas.microsoft.com/office/drawing/2014/main" val="10003"/>
-                  </a:ext>
-                </a:extLst>
-              </a:tr>
-            </a:tbl>
-          </a:graphicData>
-        </a:graphic>
-      </p:graphicFrame>
+      <p:pic>
+        <p:nvPicPr>
+          <p:cNvPr id="8" name="Imagen 7">
+            <a:extLst>
+              <a:ext uri="{FF2B5EF4-FFF2-40B4-BE49-F238E27FC236}">
+                <a16:creationId xmlns:a16="http://schemas.microsoft.com/office/drawing/2014/main" id="{69BFFA3E-DD9D-2F6B-12EB-172C6A41D47C}"/>
+              </a:ext>
+            </a:extLst>
+          </p:cNvPr>
+          <p:cNvPicPr>
+            <a:picLocks noChangeAspect="1"/>
+          </p:cNvPicPr>
+          <p:nvPr/>
+        </p:nvPicPr>
+        <p:blipFill>
+          <a:blip r:embed="rId3"/>
+          <a:srcRect t="8373" b="8233"/>
+          <a:stretch>
+            <a:fillRect/>
+          </a:stretch>
+        </p:blipFill>
+        <p:spPr>
+          <a:xfrm>
+            <a:off x="666564" y="1376359"/>
+            <a:ext cx="10424424" cy="4346666"/>
+          </a:xfrm>
+          <a:prstGeom prst="rect">
+            <a:avLst/>
+          </a:prstGeom>
+        </p:spPr>
+      </p:pic>
     </p:spTree>
   </p:cSld>
   <p:clrMapOvr>
@@ -5988,8 +5405,8 @@
         </p:nvSpPr>
         <p:spPr>
           <a:xfrm>
-            <a:off x="548640" y="2880360"/>
-            <a:ext cx="11091672" cy="1463040"/>
+            <a:off x="365760" y="1098213"/>
+            <a:ext cx="11091672" cy="1038497"/>
           </a:xfrm>
           <a:prstGeom prst="roundRect">
             <a:avLst/>
@@ -6020,7 +5437,7 @@
         </p:nvSpPr>
         <p:spPr>
           <a:xfrm>
-            <a:off x="822960" y="2971800"/>
+            <a:off x="640080" y="977381"/>
             <a:ext cx="10543032" cy="1280160"/>
           </a:xfrm>
           <a:prstGeom prst="rect">
@@ -6037,7 +5454,7 @@
               <a:buNone/>
             </a:pPr>
             <a:r>
-              <a:rPr lang="en-US" sz="2000" dirty="0">
+              <a:rPr lang="en-US" sz="1600" dirty="0">
                 <a:solidFill>
                   <a:srgbClr val="212121"/>
                 </a:solidFill>
@@ -6047,10 +5464,41 @@
               </a:rPr>
               <a:t>Imagina que quieres un ranking de editoriales ordenado por cuántos libros tiene cada una en el catálogo. Es una consulta fija, pero con JOIN, agregación y ordenación por el resultado de esa agregación — el caso típico de @Query.</a:t>
             </a:r>
-            <a:endParaRPr lang="en-US" sz="2000" dirty="0"/>
-          </a:p>
-        </p:txBody>
-      </p:sp>
+            <a:endParaRPr lang="en-US" sz="1600" dirty="0"/>
+          </a:p>
+        </p:txBody>
+      </p:sp>
+      <p:pic>
+        <p:nvPicPr>
+          <p:cNvPr id="8" name="Imagen 7">
+            <a:extLst>
+              <a:ext uri="{FF2B5EF4-FFF2-40B4-BE49-F238E27FC236}">
+                <a16:creationId xmlns:a16="http://schemas.microsoft.com/office/drawing/2014/main" id="{2DE6764F-7FDA-B0DD-C1B4-E7D9B48D4EBB}"/>
+              </a:ext>
+            </a:extLst>
+          </p:cNvPr>
+          <p:cNvPicPr>
+            <a:picLocks noChangeAspect="1"/>
+          </p:cNvPicPr>
+          <p:nvPr/>
+        </p:nvPicPr>
+        <p:blipFill>
+          <a:blip r:embed="rId3"/>
+          <a:srcRect l="1378" t="7043" r="-1378" b="8750"/>
+          <a:stretch>
+            <a:fillRect/>
+          </a:stretch>
+        </p:blipFill>
+        <p:spPr>
+          <a:xfrm>
+            <a:off x="1679511" y="2257541"/>
+            <a:ext cx="9214472" cy="3879669"/>
+          </a:xfrm>
+          <a:prstGeom prst="rect">
+            <a:avLst/>
+          </a:prstGeom>
+        </p:spPr>
+      </p:pic>
     </p:spTree>
   </p:cSld>
   <p:clrMapOvr>
